--- a/public/fun/pack/pptx/talkpro/발표템플릿프리미엄_24_모임·동호회소개_코랄샌드.pptx
+++ b/public/fun/pack/pptx/talkpro/발표템플릿프리미엄_24_모임·동호회소개_코랄샌드.pptx
@@ -115,12 +115,12 @@
   <p:extLst>
     <p:ext uri="{521415D9-36F7-43E2-AB2F-B90AF26B5E84}">
       <p14:sectionLst xmlns:p14="http://schemas.microsoft.com/office/powerpoint/2010/main">
-        <p14:section name="시작" id="{32EA4A27-81F8-4E9B-AE93-C3AF71629E0F}">
+        <p14:section name="시작" id="{F1CACECF-9ECF-4CD8-9ACF-13275E61BE4D}">
           <p14:sldIdLst>
             <p14:sldId id="256"/>
           </p14:sldIdLst>
         </p14:section>
-        <p14:section name="본문" id="{1E196148-41B8-47E0-9D61-4007D8841A95}">
+        <p14:section name="본문" id="{3FCDCDA4-0F88-42D0-B40C-82759A673D0A}">
           <p14:sldIdLst>
             <p14:sldId id="257"/>
             <p14:sldId id="258"/>
@@ -131,7 +131,7 @@
             <p14:sldId id="263"/>
           </p14:sldIdLst>
         </p14:section>
-        <p14:section name="마무리" id="{14CE4D6F-DE7A-4FC7-889A-28E6A9688FB3}">
+        <p14:section name="마무리" id="{CB7514EF-5745-48D7-BD9F-C08BD0D98C3C}">
           <p14:sldIdLst>
             <p14:sldId id="264"/>
           </p14:sldIdLst>
@@ -1938,7 +1938,7 @@
             </a:lvl1pPr>
           </a:lstStyle>
           <a:p>
-            <a:fld id="{D6266B05-3D61-4D9B-B3A1-B1E818D0C84F}" type="slidenum">
+            <a:fld id="{A794F09F-03A5-46D8-82FA-134712FB2766}" type="slidenum">
               <a:rPr lang="en-US"/>
               <a:t>‹#›</a:t>
             </a:fld>
@@ -2610,7 +2610,7 @@
             </a:lvl1pPr>
           </a:lstStyle>
           <a:p>
-            <a:fld id="{0A0ACB0A-D9DE-4397-ADE9-77A0C70665D9}" type="slidenum">
+            <a:fld id="{0E1DC042-BD60-48CF-896A-647727EA7CF0}" type="slidenum">
               <a:rPr lang="en-US"/>
               <a:t>‹#›</a:t>
             </a:fld>
@@ -3247,7 +3247,7 @@
             </a:lvl1pPr>
           </a:lstStyle>
           <a:p>
-            <a:fld id="{BE1DD319-3C0D-49BA-97EB-625E11541BCD}" type="slidenum">
+            <a:fld id="{B04276E4-336C-4FAB-91BB-ED964C65C60C}" type="slidenum">
               <a:rPr lang="en-US"/>
               <a:t>‹#›</a:t>
             </a:fld>
@@ -4086,7 +4086,7 @@
           <a:p>
             <a:r>
               <a:rPr lang="ko-KR"/>
-              <a:t>여름 모임 일정을 먼저 안내합니다</a:t>
+              <a:t>다음 모임 일정을 먼저 안내합니다</a:t>
             </a:r>
           </a:p>
         </p:txBody>
@@ -4114,7 +4114,7 @@
           <a:p>
             <a:r>
               <a:rPr lang="ko-KR"/>
-              <a:t>0000. 00. 00</a:t>
+              <a:t>날짜 입력</a:t>
             </a:r>
           </a:p>
         </p:txBody>
@@ -4199,7 +4199,7 @@
           <a:bodyPr/>
           <a:lstStyle/>
           <a:p>
-            <a:fld id="{24EFD49E-9C3F-4F39-B807-3B2B069C4D37}" type="slidenum">
+            <a:fld id="{32FB1579-5545-4DC3-BBB3-410EE4DA8AA8}" type="slidenum">
               <a:rPr lang="en-US"/>
               <a:t>‹#›</a:t>
             </a:fld>
@@ -5313,7 +5313,7 @@
           <a:bodyPr/>
           <a:lstStyle/>
           <a:p>
-            <a:fld id="{C8030AF6-88C7-44B2-8641-CF5A9848A260}" type="slidenum">
+            <a:fld id="{CCCC1373-7BFE-4CE9-9917-214DC2F53740}" type="slidenum">
               <a:rPr lang="en-US"/>
               <a:t>‹#›</a:t>
             </a:fld>
@@ -5401,7 +5401,7 @@
           <a:bodyPr/>
           <a:lstStyle/>
           <a:p>
-            <a:fld id="{EE787155-BD6B-4A1A-9274-5DD413033610}" type="slidenum">
+            <a:fld id="{96016E9B-2087-4119-A7EE-0C9BB7B5ED51}" type="slidenum">
               <a:rPr lang="en-US"/>
               <a:t>‹#›</a:t>
             </a:fld>
@@ -6308,7 +6308,7 @@
           <a:bodyPr/>
           <a:lstStyle/>
           <a:p>
-            <a:fld id="{4DAC1A2E-B84B-430C-AFAA-07768435086B}" type="slidenum">
+            <a:fld id="{6F110EC3-DCF6-4477-8C25-8FFB14A4C540}" type="slidenum">
               <a:rPr lang="en-US"/>
               <a:t>‹#›</a:t>
             </a:fld>
@@ -6912,7 +6912,7 @@
           <a:bodyPr/>
           <a:lstStyle/>
           <a:p>
-            <a:fld id="{F17B46AE-B251-475B-96A1-A0091FC1923A}" type="slidenum">
+            <a:fld id="{36A03AAB-482B-4B41-997B-D8AC8C775186}" type="slidenum">
               <a:rPr lang="en-US"/>
               <a:t>‹#›</a:t>
             </a:fld>
@@ -7095,7 +7095,7 @@
           <a:bodyPr/>
           <a:lstStyle/>
           <a:p>
-            <a:fld id="{7AE1C96A-97D6-4EE0-81B8-071AC2E083D8}" type="slidenum">
+            <a:fld id="{38EEFAAE-439D-4056-B076-5A34CF8DA054}" type="slidenum">
               <a:rPr lang="en-US"/>
               <a:t>‹#›</a:t>
             </a:fld>
@@ -8159,7 +8159,7 @@
           <a:bodyPr/>
           <a:lstStyle/>
           <a:p>
-            <a:fld id="{29AA97A5-E6E8-4E3E-BBEB-0D3DF2644AB4}" type="slidenum">
+            <a:fld id="{3D31AB44-179B-4BE0-999B-6CDD07F78FA2}" type="slidenum">
               <a:rPr lang="en-US"/>
               <a:t>‹#›</a:t>
             </a:fld>
